--- a/slides/benchmark_overview.pptx
+++ b/slides/benchmark_overview.pptx
@@ -4470,7 +4470,7 @@
                 </a:solidFill>
                 <a:latin typeface="Calibri"/>
               </a:rPr>
-              <a:t>•  trace proxy :8001 · vLLM OTLP :4317 · Langfuse · LiteLLM — per-request content / timing / cost</a:t>
+              <a:t>•  LiteLLM SDK/gateway → traces/litellm_trace.jsonl — per-request content / tokens / cost</a:t>
             </a:r>
           </a:p>
         </p:txBody>
@@ -4804,7 +4804,7 @@
         </p:nvGraphicFramePr>
         <p:xfrm>
           <a:off x="411480" y="1371600"/>
-          <a:ext cx="11384275" cy="4206240"/>
+          <a:ext cx="11384280" cy="4206240"/>
         </p:xfrm>
         <a:graphic>
           <a:graphicData uri="http://schemas.openxmlformats.org/drawingml/2006/table">
@@ -4813,11 +4813,11 @@
                 <a:tableStyleId>{5C22544A-7EE6-4342-B048-85BDC9FD1C3A}</a:tableStyleId>
               </a:tblPr>
               <a:tblGrid>
-                <a:gridCol w="1051559"/>
-                <a:gridCol w="3657599"/>
-                <a:gridCol w="1691639"/>
-                <a:gridCol w="1417319"/>
-                <a:gridCol w="3566159"/>
+                <a:gridCol w="1051560"/>
+                <a:gridCol w="3657600"/>
+                <a:gridCol w="1691640"/>
+                <a:gridCol w="1417320"/>
+                <a:gridCol w="3566160"/>
               </a:tblGrid>
               <a:tr h="701040">
                 <a:tc>
@@ -8787,7 +8787,7 @@
                           </a:solidFill>
                           <a:latin typeface="Calibri"/>
                         </a:rPr>
-                        <a:t>docs/OBSERVABILITY.md · docs/TRACING.md (proxy, OTLP, Langfuse, LiteLLM)</a:t>
+                        <a:t>docs/OBSERVABILITY.md (LiteLLM trace + cost logging)</a:t>
                       </a:r>
                     </a:p>
                   </a:txBody>

--- a/slides/benchmark_overview.pptx
+++ b/slides/benchmark_overview.pptx
@@ -5722,7 +5722,7 @@
                 </a:solidFill>
                 <a:latin typeface="Calibri"/>
               </a:rPr>
-              <a:t>file stats: scripts/dataset_stats.py (tokens ≈ chars/4) · served ISL/OSL: aiperf, report_v6</a:t>
+              <a:t>file stats: scripts/dataset_stats.py (tokens ≈ chars/4) · served ISL/OSL: aiperf</a:t>
             </a:r>
           </a:p>
         </p:txBody>
@@ -8150,7 +8150,7 @@
                 </a:solidFill>
                 <a:latin typeface="Calibri"/>
               </a:rPr>
-              <a:t>full tables: report_v6/SUMMARY.md · figures: report_v6/figures/</a:t>
+              <a:t>tables + figures: scripts/summarize_final.py · scripts/plot_pareto.py (from results/final/)</a:t>
             </a:r>
           </a:p>
         </p:txBody>
@@ -8326,72 +8326,6 @@
                 <a:latin typeface="Calibri"/>
               </a:rPr>
               <a:t>Big batch budget pays: max-num-batched-tokens 248,320 lets 16 rag prefills batch in one step — TTFT −35 %, req/s +24 % (vs default budget; GPU util 0.5→0.85 changed with it)</a:t>
-            </a:r>
-          </a:p>
-        </p:txBody>
-      </p:sp>
-      <p:pic>
-        <p:nvPicPr>
-          <p:cNvPr id="6" name="Picture 5" descr="pareto.png"/>
-          <p:cNvPicPr>
-            <a:picLocks noChangeAspect="1"/>
-          </p:cNvPicPr>
-          <p:nvPr/>
-        </p:nvPicPr>
-        <p:blipFill>
-          <a:blip r:embed="rId2"/>
-          <a:stretch>
-            <a:fillRect/>
-          </a:stretch>
-        </p:blipFill>
-        <p:spPr>
-          <a:xfrm>
-            <a:off x="6537960" y="1417320"/>
-            <a:ext cx="5394960" cy="2157984"/>
-          </a:xfrm>
-          <a:prstGeom prst="rect">
-            <a:avLst/>
-          </a:prstGeom>
-        </p:spPr>
-      </p:pic>
-      <p:sp>
-        <p:nvSpPr>
-          <p:cNvPr id="7" name="TextBox 6"/>
-          <p:cNvSpPr txBox="1"/>
-          <p:nvPr/>
-        </p:nvSpPr>
-        <p:spPr>
-          <a:xfrm>
-            <a:off x="6537960" y="5989320"/>
-            <a:ext cx="5394960" cy="365760"/>
-          </a:xfrm>
-          <a:prstGeom prst="rect">
-            <a:avLst/>
-          </a:prstGeom>
-          <a:noFill/>
-        </p:spPr>
-        <p:txBody>
-          <a:bodyPr wrap="square" anchor="t">
-            <a:spAutoFit/>
-          </a:bodyPr>
-          <a:lstStyle/>
-          <a:p>
-            <a:pPr algn="ctr">
-              <a:lnSpc>
-                <a:spcPct val="100000"/>
-              </a:lnSpc>
-              <a:spcAft>
-                <a:spcPts val="200"/>
-              </a:spcAft>
-            </a:pPr>
-            <a:r>
-              <a:rPr sz="1000" b="0">
-                <a:solidFill>
-                  <a:srgbClr val="5A6670"/>
-                </a:solidFill>
-                <a:latin typeface="Calibri"/>
-              </a:rPr>
-              <a:t>Throughput vs per-user interactivity (Pareto), per workload &amp; concurrency</a:t>
             </a:r>
           </a:p>
         </p:txBody>
@@ -8741,7 +8675,7 @@
                           </a:solidFill>
                           <a:latin typeface="Calibri"/>
                         </a:rPr>
-                        <a:t>report_v6/ (SUMMARY.md, RESULTS.md, figures/) · earlier passes in RESULTS.md</a:t>
+                        <a:t>results/final/ → summarize_final.py + plot_pareto.py · earlier passes in RESULTS.md</a:t>
                       </a:r>
                     </a:p>
                   </a:txBody>
